--- a/docs/presentation.pptx
+++ b/docs/presentation.pptx
@@ -224,10 +224,10 @@
                   <c:v>20.0</c:v>
                 </c:pt>
                 <c:pt idx="2">
-                  <c:v>113.1</c:v>
+                  <c:v>95.2</c:v>
                 </c:pt>
                 <c:pt idx="3">
-                  <c:v>70.8</c:v>
+                  <c:v>80.2</c:v>
                 </c:pt>
               </c:numCache>
             </c:numRef>
@@ -5663,7 +5663,7 @@
                           </a:solidFill>
                           <a:latin typeface="Segoe UI"/>
                         </a:rPr>
-                        <a:t>72.2 %</a:t>
+                        <a:t>86.4 %</a:t>
                       </a:r>
                     </a:p>
                   </a:txBody>
@@ -5685,7 +5685,7 @@
                           </a:solidFill>
                           <a:latin typeface="Segoe UI"/>
                         </a:rPr>
-                        <a:t>19.5 %</a:t>
+                        <a:t>17.5 %</a:t>
                       </a:r>
                     </a:p>
                   </a:txBody>
@@ -5707,7 +5707,7 @@
                           </a:solidFill>
                           <a:latin typeface="Segoe UI"/>
                         </a:rPr>
-                        <a:t>1.75</a:t>
+                        <a:t>1.79</a:t>
                       </a:r>
                     </a:p>
                   </a:txBody>
@@ -5933,7 +5933,7 @@
                           </a:solidFill>
                           <a:latin typeface="Segoe UI"/>
                         </a:rPr>
-                        <a:t>14.6 %</a:t>
+                        <a:t>0.4 %</a:t>
                       </a:r>
                     </a:p>
                   </a:txBody>
@@ -5955,7 +5955,7 @@
                           </a:solidFill>
                           <a:latin typeface="Segoe UI"/>
                         </a:rPr>
-                        <a:t>7.2 %</a:t>
+                        <a:t>20.0 %</a:t>
                       </a:r>
                     </a:p>
                   </a:txBody>
@@ -5977,7 +5977,7 @@
                           </a:solidFill>
                           <a:latin typeface="Segoe UI"/>
                         </a:rPr>
-                        <a:t>2.31</a:t>
+                        <a:t>13.19</a:t>
                       </a:r>
                     </a:p>
                   </a:txBody>
@@ -6026,7 +6026,7 @@
                 </a:solidFill>
                 <a:latin typeface="Segoe UI"/>
               </a:rPr>
-              <a:t>•  В отказах по недостоверным данным прибор расходится с лабораторией в 8.9 раза сильнее, чем в моментах с решением</a:t>
+              <a:t>•  В отказах по недостоверным данным прибор расходится с лабораторией в 8.7 раза сильнее, чем в моментах с решением</a:t>
             </a:r>
           </a:p>
           <a:p>
@@ -6042,7 +6042,7 @@
                 </a:solidFill>
                 <a:latin typeface="Segoe UI"/>
               </a:rPr>
-              <a:t>•  Превышений в них 24.2 % против 19.5 % в моментах с решением: отказ не прячет трудные моменты</a:t>
+              <a:t>•  Превышений в них 24.2 % против 17.5 % — больше допуска нашего правила (5 п.п.): после вета тяжести в решения перешли спокойные моменты конца цикла, база сравнения сместилась. Говорим это сами</a:t>
             </a:r>
           </a:p>
           <a:p>
@@ -6058,7 +6058,7 @@
                 </a:solidFill>
                 <a:latin typeface="Segoe UI"/>
               </a:rPr>
-              <a:t>•  «Нет допустимых вариантов» — 14.6 % моментов теста, в основном конец цикла катализатора: высокая тяжесть вычёркивает все варианты. Найдено 21.09, кандидат проверяется по правилу до счёта</a:t>
+              <a:t>•  «Нет допустимых вариантов» — 0.4 % моментов теста (было 14.6 %): высокая тяжесть режима вычёркивает теперь только варианты, которые греют или утяжеляют режим — по правилу до счёта</a:t>
             </a:r>
           </a:p>
         </p:txBody>
@@ -6295,7 +6295,7 @@
                 </a:solidFill>
                 <a:latin typeface="Segoe UI"/>
               </a:rPr>
-              <a:t>Включено (10)</a:t>
+              <a:t>Включено (12)</a:t>
             </a:r>
           </a:p>
         </p:txBody>
@@ -6481,64 +6481,6 @@
               <a:t>•  Расхождение двух анализаторов — строкой в карточке</a:t>
             </a:r>
           </a:p>
-        </p:txBody>
-      </p:sp>
-      <p:sp>
-        <p:nvSpPr>
-          <p:cNvPr id="8" name="TextBox 7"/>
-          <p:cNvSpPr txBox="1"/>
-          <p:nvPr/>
-        </p:nvSpPr>
-        <p:spPr>
-          <a:xfrm>
-            <a:off x="6278727" y="1280160"/>
-            <a:ext cx="5364327" cy="457200"/>
-          </a:xfrm>
-          <a:prstGeom prst="rect">
-            <a:avLst/>
-          </a:prstGeom>
-          <a:noFill/>
-        </p:spPr>
-        <p:txBody>
-          <a:bodyPr wrap="square" anchor="t" lIns="45720" rIns="45720">
-            <a:spAutoFit/>
-          </a:bodyPr>
-          <a:lstStyle/>
-          <a:p>
-            <a:pPr algn="l"/>
-            <a:r>
-              <a:rPr sz="1800" b="1">
-                <a:solidFill>
-                  <a:srgbClr val="B03A2E"/>
-                </a:solidFill>
-                <a:latin typeface="Segoe UI"/>
-              </a:rPr>
-              <a:t>Проверено и отклонено (10)</a:t>
-            </a:r>
-          </a:p>
-        </p:txBody>
-      </p:sp>
-      <p:sp>
-        <p:nvSpPr>
-          <p:cNvPr id="9" name="TextBox 8"/>
-          <p:cNvSpPr txBox="1"/>
-          <p:nvPr/>
-        </p:nvSpPr>
-        <p:spPr>
-          <a:xfrm>
-            <a:off x="6278727" y="1783080"/>
-            <a:ext cx="5364327" cy="4206240"/>
-          </a:xfrm>
-          <a:prstGeom prst="rect">
-            <a:avLst/>
-          </a:prstGeom>
-          <a:noFill/>
-        </p:spPr>
-        <p:txBody>
-          <a:bodyPr wrap="square" anchor="t" lIns="45720" rIns="45720">
-            <a:spAutoFit/>
-          </a:bodyPr>
-          <a:lstStyle/>
           <a:p>
             <a:pPr algn="l">
               <a:spcAft>
@@ -6552,7 +6494,7 @@
                 </a:solidFill>
                 <a:latin typeface="Segoe UI"/>
               </a:rPr>
-              <a:t>•  Отказ при расхождении анализаторов</a:t>
+              <a:t>•  Высокая тяжесть вычёркивает только то, что греет</a:t>
             </a:r>
           </a:p>
           <a:p>
@@ -6568,9 +6510,67 @@
                 </a:solidFill>
                 <a:latin typeface="Segoe UI"/>
               </a:rPr>
-              <a:t>•  Предупреждение по режиму АВТ за 2 часа</a:t>
-            </a:r>
-          </a:p>
+              <a:t>•  Т95 по верхней границе доверия в ограничении</a:t>
+            </a:r>
+          </a:p>
+        </p:txBody>
+      </p:sp>
+      <p:sp>
+        <p:nvSpPr>
+          <p:cNvPr id="8" name="TextBox 7"/>
+          <p:cNvSpPr txBox="1"/>
+          <p:nvPr/>
+        </p:nvSpPr>
+        <p:spPr>
+          <a:xfrm>
+            <a:off x="6278727" y="1280160"/>
+            <a:ext cx="5364327" cy="457200"/>
+          </a:xfrm>
+          <a:prstGeom prst="rect">
+            <a:avLst/>
+          </a:prstGeom>
+          <a:noFill/>
+        </p:spPr>
+        <p:txBody>
+          <a:bodyPr wrap="square" anchor="t" lIns="45720" rIns="45720">
+            <a:spAutoFit/>
+          </a:bodyPr>
+          <a:lstStyle/>
+          <a:p>
+            <a:pPr algn="l"/>
+            <a:r>
+              <a:rPr sz="1800" b="1">
+                <a:solidFill>
+                  <a:srgbClr val="B03A2E"/>
+                </a:solidFill>
+                <a:latin typeface="Segoe UI"/>
+              </a:rPr>
+              <a:t>Проверено и отклонено (11)</a:t>
+            </a:r>
+          </a:p>
+        </p:txBody>
+      </p:sp>
+      <p:sp>
+        <p:nvSpPr>
+          <p:cNvPr id="9" name="TextBox 8"/>
+          <p:cNvSpPr txBox="1"/>
+          <p:nvPr/>
+        </p:nvSpPr>
+        <p:spPr>
+          <a:xfrm>
+            <a:off x="6278727" y="1783080"/>
+            <a:ext cx="5364327" cy="4206240"/>
+          </a:xfrm>
+          <a:prstGeom prst="rect">
+            <a:avLst/>
+          </a:prstGeom>
+          <a:noFill/>
+        </p:spPr>
+        <p:txBody>
+          <a:bodyPr wrap="square" anchor="t" lIns="45720" rIns="45720">
+            <a:spAutoFit/>
+          </a:bodyPr>
+          <a:lstStyle/>
           <a:p>
             <a:pPr algn="l">
               <a:spcAft>
@@ -6584,7 +6584,7 @@
                 </a:solidFill>
                 <a:latin typeface="Segoe UI"/>
               </a:rPr>
-              <a:t>•  Раннее предупреждение нейросетью за 2 часа</a:t>
+              <a:t>•  Отказ при расхождении анализаторов</a:t>
             </a:r>
           </a:p>
           <a:p>
@@ -6600,7 +6600,7 @@
                 </a:solidFill>
                 <a:latin typeface="Segoe UI"/>
               </a:rPr>
-              <a:t>•  Ранжирование по цене ошибки вместо весов</a:t>
+              <a:t>•  Предупреждение по режиму АВТ за 2 часа</a:t>
             </a:r>
           </a:p>
           <a:p>
@@ -6616,7 +6616,7 @@
                 </a:solidFill>
                 <a:latin typeface="Segoe UI"/>
               </a:rPr>
-              <a:t>•  Рост перепада Р-202 в тяжести режима</a:t>
+              <a:t>•  Раннее предупреждение нейросетью за 2 часа</a:t>
             </a:r>
           </a:p>
           <a:p>
@@ -6632,7 +6632,7 @@
                 </a:solidFill>
                 <a:latin typeface="Segoe UI"/>
               </a:rPr>
-              <a:t>•  Возврат к базовому режиму после вмешательства</a:t>
+              <a:t>•  Ранжирование по цене ошибки вместо весов</a:t>
             </a:r>
           </a:p>
           <a:p>
@@ -6648,7 +6648,7 @@
                 </a:solidFill>
                 <a:latin typeface="Segoe UI"/>
               </a:rPr>
-              <a:t>•  План из нескольких шагов в карточке</a:t>
+              <a:t>•  Рост перепада Р-202 в тяжести режима</a:t>
             </a:r>
           </a:p>
           <a:p>
@@ -6664,7 +6664,7 @@
                 </a:solidFill>
                 <a:latin typeface="Segoe UI"/>
               </a:rPr>
-              <a:t>•  Q21 как отдельный источник риска</a:t>
+              <a:t>•  Возврат к базовому режиму после вмешательства</a:t>
             </a:r>
           </a:p>
           <a:p>
@@ -6680,7 +6680,7 @@
                 </a:solidFill>
                 <a:latin typeface="Segoe UI"/>
               </a:rPr>
-              <a:t>•  Т95 комбинацией оценок вместо прошлого анализа</a:t>
+              <a:t>•  План из нескольких шагов в карточке</a:t>
             </a:r>
           </a:p>
           <a:p>
@@ -6696,7 +6696,55 @@
                 </a:solidFill>
                 <a:latin typeface="Segoe UI"/>
               </a:rPr>
+              <a:t>•  Q21 как отдельный источник риска</a:t>
+            </a:r>
+          </a:p>
+          <a:p>
+            <a:pPr algn="l">
+              <a:spcAft>
+                <a:spcPts val="300"/>
+              </a:spcAft>
+            </a:pPr>
+            <a:r>
+              <a:rPr sz="1300" b="0">
+                <a:solidFill>
+                  <a:srgbClr val="111827"/>
+                </a:solidFill>
+                <a:latin typeface="Segoe UI"/>
+              </a:rPr>
+              <a:t>•  Т95 комбинацией оценок вместо прошлого анализа</a:t>
+            </a:r>
+          </a:p>
+          <a:p>
+            <a:pPr algn="l">
+              <a:spcAft>
+                <a:spcPts val="300"/>
+              </a:spcAft>
+            </a:pPr>
+            <a:r>
+              <a:rPr sz="1300" b="0">
+                <a:solidFill>
+                  <a:srgbClr val="111827"/>
+                </a:solidFill>
+                <a:latin typeface="Segoe UI"/>
+              </a:rPr>
               <a:t>•  Т95 по формуле ВАК или модели</a:t>
+            </a:r>
+          </a:p>
+          <a:p>
+            <a:pPr algn="l">
+              <a:spcAft>
+                <a:spcPts val="300"/>
+              </a:spcAft>
+            </a:pPr>
+            <a:r>
+              <a:rPr sz="1300" b="0">
+                <a:solidFill>
+                  <a:srgbClr val="111827"/>
+                </a:solidFill>
+                <a:latin typeface="Segoe UI"/>
+              </a:rPr>
+              <a:t>•  Границы уставок с поправкой на старение катализатора</a:t>
             </a:r>
           </a:p>
         </p:txBody>
@@ -11006,7 +11054,7 @@
                 </a:solidFill>
                 <a:latin typeface="Segoe UI"/>
               </a:rPr>
-              <a:t>77 % / 52 %</a:t>
+              <a:t>80 % / 53 %</a:t>
             </a:r>
           </a:p>
         </p:txBody>
@@ -11122,7 +11170,7 @@
                 </a:solidFill>
                 <a:latin typeface="Segoe UI"/>
               </a:rPr>
-              <a:t>в 12 раз</a:t>
+              <a:t>в 11 раз</a:t>
             </a:r>
           </a:p>
         </p:txBody>
@@ -11157,7 +11205,7 @@
                 </a:solidFill>
                 <a:latin typeface="Segoe UI"/>
               </a:rPr>
-              <a:t>меньше двигает уставки, чем одноагентная система: 70.8 °C против 846 за полгода</a:t>
+              <a:t>меньше двигает уставки, чем одноагентная система: 80.2 °C против 846 за полгода</a:t>
             </a:r>
           </a:p>
         </p:txBody>
@@ -11727,7 +11775,7 @@
                 </a:solidFill>
                 <a:latin typeface="Segoe UI"/>
               </a:rPr>
-              <a:t>•  В окне от 2 ч до отбора до публикации анализа система реагирует на 77 % проб с превышением против 52 % нормальных</a:t>
+              <a:t>•  В окне от 2 ч до отбора до публикации анализа система реагирует на 80 % проб с превышением против 53 % нормальных</a:t>
             </a:r>
           </a:p>
           <a:p>
@@ -13483,7 +13531,7 @@
                           </a:solidFill>
                           <a:latin typeface="Segoe UI"/>
                         </a:rPr>
-                        <a:t>83</a:t>
+                        <a:t>104</a:t>
                       </a:r>
                     </a:p>
                   </a:txBody>
@@ -13505,7 +13553,7 @@
                           </a:solidFill>
                           <a:latin typeface="Segoe UI"/>
                         </a:rPr>
-                        <a:t>124</a:t>
+                        <a:t>59</a:t>
                       </a:r>
                     </a:p>
                   </a:txBody>
@@ -13527,7 +13575,7 @@
                           </a:solidFill>
                           <a:latin typeface="Segoe UI"/>
                         </a:rPr>
-                        <a:t>0.65</a:t>
+                        <a:t>0.68</a:t>
                       </a:r>
                     </a:p>
                   </a:txBody>
@@ -13549,7 +13597,7 @@
                           </a:solidFill>
                           <a:latin typeface="Segoe UI"/>
                         </a:rPr>
-                        <a:t>0.21</a:t>
+                        <a:t>0.27</a:t>
                       </a:r>
                     </a:p>
                   </a:txBody>
@@ -13571,7 +13619,7 @@
                           </a:solidFill>
                           <a:latin typeface="Segoe UI"/>
                         </a:rPr>
-                        <a:t>70.8</a:t>
+                        <a:t>80.2</a:t>
                       </a:r>
                     </a:p>
                   </a:txBody>
@@ -13705,7 +13753,7 @@
                           </a:solidFill>
                           <a:latin typeface="Segoe UI"/>
                         </a:rPr>
-                        <a:t>113.1</a:t>
+                        <a:t>95.2</a:t>
                       </a:r>
                     </a:p>
                   </a:txBody>
@@ -14040,7 +14088,7 @@
                 </a:solidFill>
                 <a:latin typeface="Segoe UI"/>
               </a:rPr>
-              <a:t>•  Одноагентная двигает уставки в 12 раз больше и пропускает не меньше (0.74 против 0.65)</a:t>
+              <a:t>•  Одноагентная двигает уставки в 11 раз больше и пропускает не меньше (0.74 против 0.68)</a:t>
             </a:r>
           </a:p>
           <a:p>

--- a/docs/presentation.pptx
+++ b/docs/presentation.pptx
@@ -14120,7 +14120,7 @@
                 </a:solidFill>
                 <a:latin typeface="Segoe UI"/>
               </a:rPr>
-              <a:t>•  Без агента надёжности — больше ложных тревог и хода уставок</a:t>
+              <a:t>•  Без агента надёжности ход уставок 95.2 °C против 80.2; пропуски и ложные тревоги те же — агент экономит оборудование</a:t>
             </a:r>
           </a:p>
         </p:txBody>
